--- a/reference_material/slides/026_Survival_Hazard.pptx
+++ b/reference_material/slides/026_Survival_Hazard.pptx
@@ -9,19 +9,21 @@
     <p:sldId id="257" r:id="rId6"/>
     <p:sldId id="258" r:id="rId7"/>
     <p:sldId id="259" r:id="rId8"/>
-    <p:sldId id="260" r:id="rId9"/>
-    <p:sldId id="262" r:id="rId10"/>
-    <p:sldId id="267" r:id="rId11"/>
-    <p:sldId id="263" r:id="rId12"/>
-    <p:sldId id="266" r:id="rId13"/>
-    <p:sldId id="264" r:id="rId14"/>
-    <p:sldId id="261" r:id="rId15"/>
-    <p:sldId id="265" r:id="rId16"/>
-    <p:sldId id="270" r:id="rId17"/>
-    <p:sldId id="268" r:id="rId18"/>
-    <p:sldId id="272" r:id="rId19"/>
-    <p:sldId id="269" r:id="rId20"/>
-    <p:sldId id="271" r:id="rId21"/>
+    <p:sldId id="273" r:id="rId9"/>
+    <p:sldId id="260" r:id="rId10"/>
+    <p:sldId id="262" r:id="rId11"/>
+    <p:sldId id="267" r:id="rId12"/>
+    <p:sldId id="263" r:id="rId13"/>
+    <p:sldId id="266" r:id="rId14"/>
+    <p:sldId id="264" r:id="rId15"/>
+    <p:sldId id="261" r:id="rId16"/>
+    <p:sldId id="265" r:id="rId17"/>
+    <p:sldId id="270" r:id="rId18"/>
+    <p:sldId id="268" r:id="rId19"/>
+    <p:sldId id="272" r:id="rId20"/>
+    <p:sldId id="269" r:id="rId21"/>
+    <p:sldId id="274" r:id="rId22"/>
+    <p:sldId id="271" r:id="rId23"/>
   </p:sldIdLst>
   <p:sldSz cx="12192000" cy="6858000"/>
   <p:notesSz cx="6858000" cy="9144000"/>
@@ -4445,6 +4447,92 @@
 </file>
 
 <file path=ppt/slides/slide10.xml><?xml version="1.0" encoding="utf-8"?>
+<p:sld xmlns:a="http://schemas.openxmlformats.org/drawingml/2006/main" xmlns:r="http://schemas.openxmlformats.org/officeDocument/2006/relationships" xmlns:p="http://schemas.openxmlformats.org/presentationml/2006/main" show="0">
+  <p:cSld>
+    <p:spTree>
+      <p:nvGrpSpPr>
+        <p:cNvPr id="1" name=""/>
+        <p:cNvGrpSpPr/>
+        <p:nvPr/>
+      </p:nvGrpSpPr>
+      <p:grpSpPr>
+        <a:xfrm>
+          <a:off x="0" y="0"/>
+          <a:ext cx="0" cy="0"/>
+          <a:chOff x="0" y="0"/>
+          <a:chExt cx="0" cy="0"/>
+        </a:xfrm>
+      </p:grpSpPr>
+      <p:sp>
+        <p:nvSpPr>
+          <p:cNvPr id="2" name="Title 1">
+            <a:extLst>
+              <a:ext uri="{FF2B5EF4-FFF2-40B4-BE49-F238E27FC236}">
+                <a16:creationId xmlns:a16="http://schemas.microsoft.com/office/drawing/2014/main" id="{A5C6C96E-3C96-EDB9-A5ED-A18263CA6101}"/>
+              </a:ext>
+            </a:extLst>
+          </p:cNvPr>
+          <p:cNvSpPr>
+            <a:spLocks noGrp="1"/>
+          </p:cNvSpPr>
+          <p:nvPr>
+            <p:ph type="title"/>
+          </p:nvPr>
+        </p:nvSpPr>
+        <p:spPr/>
+        <p:txBody>
+          <a:bodyPr/>
+          <a:lstStyle/>
+          <a:p>
+            <a:r>
+              <a:rPr lang="en-US" dirty="0"/>
+              <a:t>Usefulness of Libraries</a:t>
+            </a:r>
+          </a:p>
+        </p:txBody>
+      </p:sp>
+      <p:sp>
+        <p:nvSpPr>
+          <p:cNvPr id="3" name="Content Placeholder 2">
+            <a:extLst>
+              <a:ext uri="{FF2B5EF4-FFF2-40B4-BE49-F238E27FC236}">
+                <a16:creationId xmlns:a16="http://schemas.microsoft.com/office/drawing/2014/main" id="{042623C5-F7C6-18C3-A125-D9916F40E24D}"/>
+              </a:ext>
+            </a:extLst>
+          </p:cNvPr>
+          <p:cNvSpPr>
+            <a:spLocks noGrp="1"/>
+          </p:cNvSpPr>
+          <p:nvPr>
+            <p:ph idx="1"/>
+          </p:nvPr>
+        </p:nvSpPr>
+        <p:spPr/>
+        <p:txBody>
+          <a:bodyPr/>
+          <a:lstStyle/>
+          <a:p>
+            <a:r>
+              <a:rPr lang="en-US" dirty="0"/>
+              <a:t>In general, we can use library functions to swap between hazard and survival. </a:t>
+            </a:r>
+          </a:p>
+        </p:txBody>
+      </p:sp>
+    </p:spTree>
+    <p:extLst>
+      <p:ext uri="{BB962C8B-B14F-4D97-AF65-F5344CB8AC3E}">
+        <p14:creationId xmlns:p14="http://schemas.microsoft.com/office/powerpoint/2010/main" val="1985276050"/>
+      </p:ext>
+    </p:extLst>
+  </p:cSld>
+  <p:clrMapOvr>
+    <a:masterClrMapping/>
+  </p:clrMapOvr>
+</p:sld>
+</file>
+
+<file path=ppt/slides/slide11.xml><?xml version="1.0" encoding="utf-8"?>
 <p:sld xmlns:a="http://schemas.openxmlformats.org/drawingml/2006/main" xmlns:r="http://schemas.openxmlformats.org/officeDocument/2006/relationships" xmlns:p="http://schemas.openxmlformats.org/presentationml/2006/main">
   <p:cSld>
     <p:spTree>
@@ -4599,7 +4687,7 @@
 </p:sld>
 </file>
 
-<file path=ppt/slides/slide11.xml><?xml version="1.0" encoding="utf-8"?>
+<file path=ppt/slides/slide12.xml><?xml version="1.0" encoding="utf-8"?>
 <p:sld xmlns:a="http://schemas.openxmlformats.org/drawingml/2006/main" xmlns:r="http://schemas.openxmlformats.org/officeDocument/2006/relationships" xmlns:p="http://schemas.openxmlformats.org/presentationml/2006/main">
   <p:cSld>
     <p:spTree>
@@ -4789,7 +4877,7 @@
 </p:sld>
 </file>
 
-<file path=ppt/slides/slide12.xml><?xml version="1.0" encoding="utf-8"?>
+<file path=ppt/slides/slide13.xml><?xml version="1.0" encoding="utf-8"?>
 <p:sld xmlns:a="http://schemas.openxmlformats.org/drawingml/2006/main" xmlns:r="http://schemas.openxmlformats.org/officeDocument/2006/relationships" xmlns:p="http://schemas.openxmlformats.org/presentationml/2006/main">
   <p:cSld>
     <p:spTree>
@@ -4947,7 +5035,7 @@
 </p:sld>
 </file>
 
-<file path=ppt/slides/slide13.xml><?xml version="1.0" encoding="utf-8"?>
+<file path=ppt/slides/slide14.xml><?xml version="1.0" encoding="utf-8"?>
 <p:sld xmlns:a="http://schemas.openxmlformats.org/drawingml/2006/main" xmlns:r="http://schemas.openxmlformats.org/officeDocument/2006/relationships" xmlns:p="http://schemas.openxmlformats.org/presentationml/2006/main">
   <p:cSld>
     <p:spTree>
@@ -5110,7 +5198,7 @@
 </p:sld>
 </file>
 
-<file path=ppt/slides/slide14.xml><?xml version="1.0" encoding="utf-8"?>
+<file path=ppt/slides/slide15.xml><?xml version="1.0" encoding="utf-8"?>
 <p:sld xmlns:a="http://schemas.openxmlformats.org/drawingml/2006/main" xmlns:r="http://schemas.openxmlformats.org/officeDocument/2006/relationships" xmlns:p="http://schemas.openxmlformats.org/presentationml/2006/main">
   <p:cSld>
     <p:spTree>
@@ -5268,7 +5356,7 @@
 </p:sld>
 </file>
 
-<file path=ppt/slides/slide15.xml><?xml version="1.0" encoding="utf-8"?>
+<file path=ppt/slides/slide16.xml><?xml version="1.0" encoding="utf-8"?>
 <p:sld xmlns:a="http://schemas.openxmlformats.org/drawingml/2006/main" xmlns:r="http://schemas.openxmlformats.org/officeDocument/2006/relationships" xmlns:p="http://schemas.openxmlformats.org/presentationml/2006/main">
   <p:cSld>
     <p:spTree>
@@ -5426,7 +5514,7 @@
 </p:sld>
 </file>
 
-<file path=ppt/slides/slide16.xml><?xml version="1.0" encoding="utf-8"?>
+<file path=ppt/slides/slide17.xml><?xml version="1.0" encoding="utf-8"?>
 <p:sld xmlns:a="http://schemas.openxmlformats.org/drawingml/2006/main" xmlns:r="http://schemas.openxmlformats.org/officeDocument/2006/relationships" xmlns:p="http://schemas.openxmlformats.org/presentationml/2006/main">
   <p:cSld>
     <p:spTree>
@@ -5585,7 +5673,131 @@
 </p:sld>
 </file>
 
-<file path=ppt/slides/slide17.xml><?xml version="1.0" encoding="utf-8"?>
+<file path=ppt/slides/slide18.xml><?xml version="1.0" encoding="utf-8"?>
+<p:sld xmlns:a="http://schemas.openxmlformats.org/drawingml/2006/main" xmlns:r="http://schemas.openxmlformats.org/officeDocument/2006/relationships" xmlns:p="http://schemas.openxmlformats.org/presentationml/2006/main">
+  <p:cSld>
+    <p:spTree>
+      <p:nvGrpSpPr>
+        <p:cNvPr id="1" name=""/>
+        <p:cNvGrpSpPr/>
+        <p:nvPr/>
+      </p:nvGrpSpPr>
+      <p:grpSpPr>
+        <a:xfrm>
+          <a:off x="0" y="0"/>
+          <a:ext cx="0" cy="0"/>
+          <a:chOff x="0" y="0"/>
+          <a:chExt cx="0" cy="0"/>
+        </a:xfrm>
+      </p:grpSpPr>
+      <p:sp>
+        <p:nvSpPr>
+          <p:cNvPr id="2" name="Title 1">
+            <a:extLst>
+              <a:ext uri="{FF2B5EF4-FFF2-40B4-BE49-F238E27FC236}">
+                <a16:creationId xmlns:a16="http://schemas.microsoft.com/office/drawing/2014/main" id="{FC85C0F8-A5B9-1B8B-0FB8-AC737FB54B8A}"/>
+              </a:ext>
+            </a:extLst>
+          </p:cNvPr>
+          <p:cNvSpPr>
+            <a:spLocks noGrp="1"/>
+          </p:cNvSpPr>
+          <p:nvPr>
+            <p:ph type="title"/>
+          </p:nvPr>
+        </p:nvSpPr>
+        <p:spPr/>
+        <p:txBody>
+          <a:bodyPr/>
+          <a:lstStyle/>
+          <a:p>
+            <a:r>
+              <a:rPr lang="en-US" dirty="0"/>
+              <a:t>Detour – Data Preparation</a:t>
+            </a:r>
+          </a:p>
+        </p:txBody>
+      </p:sp>
+      <p:sp>
+        <p:nvSpPr>
+          <p:cNvPr id="3" name="Content Placeholder 2">
+            <a:extLst>
+              <a:ext uri="{FF2B5EF4-FFF2-40B4-BE49-F238E27FC236}">
+                <a16:creationId xmlns:a16="http://schemas.microsoft.com/office/drawing/2014/main" id="{ED0DDFF6-5FAF-AB7F-2F5F-79C4CB2D7137}"/>
+              </a:ext>
+            </a:extLst>
+          </p:cNvPr>
+          <p:cNvSpPr>
+            <a:spLocks noGrp="1"/>
+          </p:cNvSpPr>
+          <p:nvPr>
+            <p:ph idx="1"/>
+          </p:nvPr>
+        </p:nvSpPr>
+        <p:spPr/>
+        <p:txBody>
+          <a:bodyPr/>
+          <a:lstStyle/>
+          <a:p>
+            <a:r>
+              <a:rPr lang="en-US" dirty="0"/>
+              <a:t>As noted, there is often specific data preparation needed. </a:t>
+            </a:r>
+          </a:p>
+          <a:p>
+            <a:r>
+              <a:rPr lang="en-US" dirty="0"/>
+              <a:t>This is a good chance to make a prep function. </a:t>
+            </a:r>
+          </a:p>
+          <a:p>
+            <a:pPr lvl="1"/>
+            <a:r>
+              <a:rPr lang="en-US" dirty="0"/>
+              <a:t>Input – original data format. </a:t>
+            </a:r>
+          </a:p>
+          <a:p>
+            <a:pPr lvl="1"/>
+            <a:r>
+              <a:rPr lang="en-US" dirty="0"/>
+              <a:t>Output – what you need. </a:t>
+            </a:r>
+          </a:p>
+          <a:p>
+            <a:pPr lvl="1"/>
+            <a:r>
+              <a:rPr lang="en-US" dirty="0"/>
+              <a:t>Arguments (optional) – can you configure different options to handle more scenarios. </a:t>
+            </a:r>
+          </a:p>
+          <a:p>
+            <a:r>
+              <a:rPr lang="en-US" dirty="0"/>
+              <a:t>This isn’t mandatory (unless specified) but is </a:t>
+            </a:r>
+            <a:r>
+              <a:rPr lang="en-US"/>
+              <a:t>good practice. </a:t>
+            </a:r>
+            <a:endParaRPr lang="en-US" dirty="0"/>
+          </a:p>
+        </p:txBody>
+      </p:sp>
+    </p:spTree>
+    <p:extLst>
+      <p:ext uri="{BB962C8B-B14F-4D97-AF65-F5344CB8AC3E}">
+        <p14:creationId xmlns:p14="http://schemas.microsoft.com/office/powerpoint/2010/main" val="698242479"/>
+      </p:ext>
+    </p:extLst>
+  </p:cSld>
+  <p:clrMapOvr>
+    <a:masterClrMapping/>
+  </p:clrMapOvr>
+</p:sld>
+</file>
+
+<file path=ppt/slides/slide19.xml><?xml version="1.0" encoding="utf-8"?>
 <p:sld xmlns:a="http://schemas.openxmlformats.org/drawingml/2006/main" xmlns:r="http://schemas.openxmlformats.org/officeDocument/2006/relationships" xmlns:p="http://schemas.openxmlformats.org/presentationml/2006/main">
   <p:cSld>
     <p:spTree>
@@ -6139,6 +6351,119 @@
           <p:cNvPr id="2" name="Title 1">
             <a:extLst>
               <a:ext uri="{FF2B5EF4-FFF2-40B4-BE49-F238E27FC236}">
+                <a16:creationId xmlns:a16="http://schemas.microsoft.com/office/drawing/2014/main" id="{D16669DA-1839-6ADF-B339-F269F12D934E}"/>
+              </a:ext>
+            </a:extLst>
+          </p:cNvPr>
+          <p:cNvSpPr>
+            <a:spLocks noGrp="1"/>
+          </p:cNvSpPr>
+          <p:nvPr>
+            <p:ph type="title"/>
+          </p:nvPr>
+        </p:nvSpPr>
+        <p:spPr/>
+        <p:txBody>
+          <a:bodyPr/>
+          <a:lstStyle/>
+          <a:p>
+            <a:r>
+              <a:rPr lang="en-US" dirty="0"/>
+              <a:t>Survival Analysis – do We Live?</a:t>
+            </a:r>
+          </a:p>
+        </p:txBody>
+      </p:sp>
+      <p:sp>
+        <p:nvSpPr>
+          <p:cNvPr id="3" name="Content Placeholder 2">
+            <a:extLst>
+              <a:ext uri="{FF2B5EF4-FFF2-40B4-BE49-F238E27FC236}">
+                <a16:creationId xmlns:a16="http://schemas.microsoft.com/office/drawing/2014/main" id="{074481CF-CA98-3E17-8327-16C24041D73E}"/>
+              </a:ext>
+            </a:extLst>
+          </p:cNvPr>
+          <p:cNvSpPr>
+            <a:spLocks noGrp="1"/>
+          </p:cNvSpPr>
+          <p:nvPr>
+            <p:ph idx="1"/>
+          </p:nvPr>
+        </p:nvSpPr>
+        <p:spPr/>
+        <p:txBody>
+          <a:bodyPr/>
+          <a:lstStyle/>
+          <a:p>
+            <a:endParaRPr lang="en-US" dirty="0"/>
+          </a:p>
+        </p:txBody>
+      </p:sp>
+      <p:pic>
+        <p:nvPicPr>
+          <p:cNvPr id="4" name="Picture 3" descr="We Trying to Stay Alive - Wikipedia">
+            <a:extLst>
+              <a:ext uri="{FF2B5EF4-FFF2-40B4-BE49-F238E27FC236}">
+                <a16:creationId xmlns:a16="http://schemas.microsoft.com/office/drawing/2014/main" id="{DF746B3A-D8D3-4EF8-06F1-7B923B40BC4C}"/>
+              </a:ext>
+            </a:extLst>
+          </p:cNvPr>
+          <p:cNvPicPr>
+            <a:picLocks noChangeAspect="1"/>
+          </p:cNvPicPr>
+          <p:nvPr/>
+        </p:nvPicPr>
+        <p:blipFill>
+          <a:blip r:embed="rId2"/>
+          <a:stretch>
+            <a:fillRect/>
+          </a:stretch>
+        </p:blipFill>
+        <p:spPr>
+          <a:xfrm>
+            <a:off x="3523702" y="1853754"/>
+            <a:ext cx="5144595" cy="4474884"/>
+          </a:xfrm>
+          <a:prstGeom prst="rect">
+            <a:avLst/>
+          </a:prstGeom>
+        </p:spPr>
+      </p:pic>
+    </p:spTree>
+    <p:extLst>
+      <p:ext uri="{BB962C8B-B14F-4D97-AF65-F5344CB8AC3E}">
+        <p14:creationId xmlns:p14="http://schemas.microsoft.com/office/powerpoint/2010/main" val="1217706670"/>
+      </p:ext>
+    </p:extLst>
+  </p:cSld>
+  <p:clrMapOvr>
+    <a:masterClrMapping/>
+  </p:clrMapOvr>
+</p:sld>
+</file>
+
+<file path=ppt/slides/slide6.xml><?xml version="1.0" encoding="utf-8"?>
+<p:sld xmlns:a="http://schemas.openxmlformats.org/drawingml/2006/main" xmlns:r="http://schemas.openxmlformats.org/officeDocument/2006/relationships" xmlns:p="http://schemas.openxmlformats.org/presentationml/2006/main">
+  <p:cSld>
+    <p:spTree>
+      <p:nvGrpSpPr>
+        <p:cNvPr id="1" name=""/>
+        <p:cNvGrpSpPr/>
+        <p:nvPr/>
+      </p:nvGrpSpPr>
+      <p:grpSpPr>
+        <a:xfrm>
+          <a:off x="0" y="0"/>
+          <a:ext cx="0" cy="0"/>
+          <a:chOff x="0" y="0"/>
+          <a:chExt cx="0" cy="0"/>
+        </a:xfrm>
+      </p:grpSpPr>
+      <p:sp>
+        <p:nvSpPr>
+          <p:cNvPr id="2" name="Title 1">
+            <a:extLst>
+              <a:ext uri="{FF2B5EF4-FFF2-40B4-BE49-F238E27FC236}">
                 <a16:creationId xmlns:a16="http://schemas.microsoft.com/office/drawing/2014/main" id="{0B194903-6688-B635-1429-43D5FCA2557E}"/>
               </a:ext>
             </a:extLst>
@@ -6180,8 +6505,8 @@
         </p:nvSpPr>
         <p:spPr>
           <a:xfrm>
-            <a:off x="1451579" y="1853754"/>
-            <a:ext cx="9603275" cy="3612591"/>
+            <a:off x="0" y="1853754"/>
+            <a:ext cx="6839402" cy="4199727"/>
           </a:xfrm>
         </p:spPr>
         <p:txBody>
@@ -6210,7 +6535,7 @@
           <a:p>
             <a:r>
               <a:rPr lang="en-US" dirty="0"/>
-              <a:t>Can also be frames as the birth and death of a datapoint. </a:t>
+              <a:t>Can also be framed as the birth and death of a datapoint. </a:t>
             </a:r>
           </a:p>
           <a:p>
@@ -6233,8 +6558,44 @@
               <a:t>Libraries can do lots of heavy lifting for us. </a:t>
             </a:r>
           </a:p>
-        </p:txBody>
-      </p:sp>
+          <a:p>
+            <a:r>
+              <a:rPr lang="en-US" dirty="0"/>
+              <a:t>Data prep work is common. </a:t>
+            </a:r>
+          </a:p>
+        </p:txBody>
+      </p:sp>
+      <p:pic>
+        <p:nvPicPr>
+          <p:cNvPr id="4" name="Picture 3" descr="Ultimate Guide to Survival Analysis">
+            <a:extLst>
+              <a:ext uri="{FF2B5EF4-FFF2-40B4-BE49-F238E27FC236}">
+                <a16:creationId xmlns:a16="http://schemas.microsoft.com/office/drawing/2014/main" id="{6A4D984F-CAC6-8234-82C0-CC430F9DB37E}"/>
+              </a:ext>
+            </a:extLst>
+          </p:cNvPr>
+          <p:cNvPicPr>
+            <a:picLocks noChangeAspect="1"/>
+          </p:cNvPicPr>
+          <p:nvPr/>
+        </p:nvPicPr>
+        <p:blipFill>
+          <a:blip r:embed="rId2"/>
+          <a:stretch>
+            <a:fillRect/>
+          </a:stretch>
+        </p:blipFill>
+        <p:spPr>
+          <a:xfrm>
+            <a:off x="6839401" y="1083918"/>
+            <a:ext cx="5352599" cy="5100981"/>
+          </a:xfrm>
+          <a:prstGeom prst="rect">
+            <a:avLst/>
+          </a:prstGeom>
+        </p:spPr>
+      </p:pic>
     </p:spTree>
     <p:extLst>
       <p:ext uri="{BB962C8B-B14F-4D97-AF65-F5344CB8AC3E}">
@@ -6248,7 +6609,7 @@
 </p:sld>
 </file>
 
-<file path=ppt/slides/slide6.xml><?xml version="1.0" encoding="utf-8"?>
+<file path=ppt/slides/slide7.xml><?xml version="1.0" encoding="utf-8"?>
 <p:sld xmlns:a="http://schemas.openxmlformats.org/drawingml/2006/main" xmlns:r="http://schemas.openxmlformats.org/officeDocument/2006/relationships" xmlns:p="http://schemas.openxmlformats.org/presentationml/2006/main">
   <p:cSld>
     <p:spTree>
@@ -6390,7 +6751,7 @@
 </p:sld>
 </file>
 
-<file path=ppt/slides/slide7.xml><?xml version="1.0" encoding="utf-8"?>
+<file path=ppt/slides/slide8.xml><?xml version="1.0" encoding="utf-8"?>
 <p:sld xmlns:a="http://schemas.openxmlformats.org/drawingml/2006/main" xmlns:r="http://schemas.openxmlformats.org/officeDocument/2006/relationships" xmlns:p="http://schemas.openxmlformats.org/presentationml/2006/main">
   <p:cSld>
     <p:spTree>
@@ -6525,7 +6886,7 @@
 </p:sld>
 </file>
 
-<file path=ppt/slides/slide8.xml><?xml version="1.0" encoding="utf-8"?>
+<file path=ppt/slides/slide9.xml><?xml version="1.0" encoding="utf-8"?>
 <p:sld xmlns:a="http://schemas.openxmlformats.org/drawingml/2006/main" xmlns:r="http://schemas.openxmlformats.org/officeDocument/2006/relationships" xmlns:p="http://schemas.openxmlformats.org/presentationml/2006/main">
   <p:cSld>
     <p:spTree>
@@ -6676,92 +7037,6 @@
     <p:extLst>
       <p:ext uri="{BB962C8B-B14F-4D97-AF65-F5344CB8AC3E}">
         <p14:creationId xmlns:p14="http://schemas.microsoft.com/office/powerpoint/2010/main" val="631946858"/>
-      </p:ext>
-    </p:extLst>
-  </p:cSld>
-  <p:clrMapOvr>
-    <a:masterClrMapping/>
-  </p:clrMapOvr>
-</p:sld>
-</file>
-
-<file path=ppt/slides/slide9.xml><?xml version="1.0" encoding="utf-8"?>
-<p:sld xmlns:a="http://schemas.openxmlformats.org/drawingml/2006/main" xmlns:r="http://schemas.openxmlformats.org/officeDocument/2006/relationships" xmlns:p="http://schemas.openxmlformats.org/presentationml/2006/main" show="0">
-  <p:cSld>
-    <p:spTree>
-      <p:nvGrpSpPr>
-        <p:cNvPr id="1" name=""/>
-        <p:cNvGrpSpPr/>
-        <p:nvPr/>
-      </p:nvGrpSpPr>
-      <p:grpSpPr>
-        <a:xfrm>
-          <a:off x="0" y="0"/>
-          <a:ext cx="0" cy="0"/>
-          <a:chOff x="0" y="0"/>
-          <a:chExt cx="0" cy="0"/>
-        </a:xfrm>
-      </p:grpSpPr>
-      <p:sp>
-        <p:nvSpPr>
-          <p:cNvPr id="2" name="Title 1">
-            <a:extLst>
-              <a:ext uri="{FF2B5EF4-FFF2-40B4-BE49-F238E27FC236}">
-                <a16:creationId xmlns:a16="http://schemas.microsoft.com/office/drawing/2014/main" id="{A5C6C96E-3C96-EDB9-A5ED-A18263CA6101}"/>
-              </a:ext>
-            </a:extLst>
-          </p:cNvPr>
-          <p:cNvSpPr>
-            <a:spLocks noGrp="1"/>
-          </p:cNvSpPr>
-          <p:nvPr>
-            <p:ph type="title"/>
-          </p:nvPr>
-        </p:nvSpPr>
-        <p:spPr/>
-        <p:txBody>
-          <a:bodyPr/>
-          <a:lstStyle/>
-          <a:p>
-            <a:r>
-              <a:rPr lang="en-US" dirty="0"/>
-              <a:t>Usefulness of Libraries</a:t>
-            </a:r>
-          </a:p>
-        </p:txBody>
-      </p:sp>
-      <p:sp>
-        <p:nvSpPr>
-          <p:cNvPr id="3" name="Content Placeholder 2">
-            <a:extLst>
-              <a:ext uri="{FF2B5EF4-FFF2-40B4-BE49-F238E27FC236}">
-                <a16:creationId xmlns:a16="http://schemas.microsoft.com/office/drawing/2014/main" id="{042623C5-F7C6-18C3-A125-D9916F40E24D}"/>
-              </a:ext>
-            </a:extLst>
-          </p:cNvPr>
-          <p:cNvSpPr>
-            <a:spLocks noGrp="1"/>
-          </p:cNvSpPr>
-          <p:nvPr>
-            <p:ph idx="1"/>
-          </p:nvPr>
-        </p:nvSpPr>
-        <p:spPr/>
-        <p:txBody>
-          <a:bodyPr/>
-          <a:lstStyle/>
-          <a:p>
-            <a:r>
-              <a:rPr lang="en-US" dirty="0"/>
-              <a:t>In general, we can use library functions to swap between hazard and survival. </a:t>
-            </a:r>
-          </a:p>
-        </p:txBody>
-      </p:sp>
-    </p:spTree>
-    <p:extLst>
-      <p:ext uri="{BB962C8B-B14F-4D97-AF65-F5344CB8AC3E}">
-        <p14:creationId xmlns:p14="http://schemas.microsoft.com/office/powerpoint/2010/main" val="1985276050"/>
       </p:ext>
     </p:extLst>
   </p:cSld>
@@ -7034,6 +7309,15 @@
 </file>
 
 <file path=customXml/item2.xml><?xml version="1.0" encoding="utf-8"?>
+<?mso-contentType ?>
+<FormTemplates xmlns="http://schemas.microsoft.com/sharepoint/v3/contenttype/forms">
+  <Display>DocumentLibraryForm</Display>
+  <Edit>DocumentLibraryForm</Edit>
+  <New>DocumentLibraryForm</New>
+</FormTemplates>
+</file>
+
+<file path=customXml/item3.xml><?xml version="1.0" encoding="utf-8"?>
 <ct:contentTypeSchema xmlns:ct="http://schemas.microsoft.com/office/2006/metadata/contentType" xmlns:ma="http://schemas.microsoft.com/office/2006/metadata/properties/metaAttributes" ct:_="" ma:_="" ma:contentTypeName="Document" ma:contentTypeID="0x01010026F5301678C67B498D338CE32F95A14E" ma:contentTypeVersion="15" ma:contentTypeDescription="Create a new document." ma:contentTypeScope="" ma:versionID="eaaf4546f4d1fda2deef56f0b8d50481">
   <xsd:schema xmlns:xsd="http://www.w3.org/2001/XMLSchema" xmlns:xs="http://www.w3.org/2001/XMLSchema" xmlns:p="http://schemas.microsoft.com/office/2006/metadata/properties" xmlns:ns1="http://schemas.microsoft.com/sharepoint/v3" xmlns:ns3="8b56a6db-b632-47f7-ac3d-cb0cb7728168" xmlns:ns4="0f3882ea-2a39-4b1a-8943-2b5857d2b62e" targetNamespace="http://schemas.microsoft.com/office/2006/metadata/properties" ma:root="true" ma:fieldsID="c424594656824f3d98654a7d4d166443" ns1:_="" ns3:_="" ns4:_="">
     <xsd:import namespace="http://schemas.microsoft.com/sharepoint/v3"/>
@@ -7273,15 +7557,6 @@
 </ct:contentTypeSchema>
 </file>
 
-<file path=customXml/item3.xml><?xml version="1.0" encoding="utf-8"?>
-<?mso-contentType ?>
-<FormTemplates xmlns="http://schemas.microsoft.com/sharepoint/v3/contenttype/forms">
-  <Display>DocumentLibraryForm</Display>
-  <Edit>DocumentLibraryForm</Edit>
-  <New>DocumentLibraryForm</New>
-</FormTemplates>
-</file>
-
 <file path=customXml/itemProps1.xml><?xml version="1.0" encoding="utf-8"?>
 <ds:datastoreItem xmlns:ds="http://schemas.openxmlformats.org/officeDocument/2006/customXml" ds:itemID="{5D419135-506A-4156-B115-5D5FDADAB719}">
   <ds:schemaRefs>
@@ -7301,6 +7576,14 @@
 </file>
 
 <file path=customXml/itemProps2.xml><?xml version="1.0" encoding="utf-8"?>
+<ds:datastoreItem xmlns:ds="http://schemas.openxmlformats.org/officeDocument/2006/customXml" ds:itemID="{9D433788-E2A9-474A-A9AA-7C51D76AEEF8}">
+  <ds:schemaRefs>
+    <ds:schemaRef ds:uri="http://schemas.microsoft.com/sharepoint/v3/contenttype/forms"/>
+  </ds:schemaRefs>
+</ds:datastoreItem>
+</file>
+
+<file path=customXml/itemProps3.xml><?xml version="1.0" encoding="utf-8"?>
 <ds:datastoreItem xmlns:ds="http://schemas.openxmlformats.org/officeDocument/2006/customXml" ds:itemID="{65F52427-8C17-472B-B062-8A002E8BDA6E}">
   <ds:schemaRefs>
     <ds:schemaRef ds:uri="http://schemas.microsoft.com/office/2006/metadata/contentType"/>
@@ -7318,12 +7601,4 @@
     <ds:schemaRef ds:uri="http://schemas.microsoft.com/internal/obd"/>
   </ds:schemaRefs>
 </ds:datastoreItem>
-</file>
-
-<file path=customXml/itemProps3.xml><?xml version="1.0" encoding="utf-8"?>
-<ds:datastoreItem xmlns:ds="http://schemas.openxmlformats.org/officeDocument/2006/customXml" ds:itemID="{9D433788-E2A9-474A-A9AA-7C51D76AEEF8}">
-  <ds:schemaRefs>
-    <ds:schemaRef ds:uri="http://schemas.microsoft.com/sharepoint/v3/contenttype/forms"/>
-  </ds:schemaRefs>
-</ds:datastoreItem>
 </file>